--- a/assets/powerpoints/module-pub/B3-le-slogan.pptx
+++ b/assets/powerpoints/module-pub/B3-le-slogan.pptx
@@ -4649,7 +4649,7 @@
                 </a:solidFill>
                 <a:latin typeface="Verdana"/>
               </a:rPr>
-              <a:t>SÉANCE B3  ·  MODULE 7</a:t>
+              <a:t>SÉANCE B3  ·  MODULE 8</a:t>
             </a:r>
           </a:p>
         </p:txBody>

--- a/assets/powerpoints/module-pub/B3-le-slogan.pptx
+++ b/assets/powerpoints/module-pub/B3-le-slogan.pptx
@@ -4645,7 +4645,7 @@
             <a:r>
               <a:rPr sz="1300" b="1" i="0" spc="156">
                 <a:solidFill>
-                  <a:srgbClr val="166534"/>
+                  <a:srgbClr val="A5335F"/>
                 </a:solidFill>
                 <a:latin typeface="Verdana"/>
               </a:rPr>
@@ -4985,7 +4985,7 @@
             <a:r>
               <a:rPr sz="1300" b="1" i="0" spc="156">
                 <a:solidFill>
-                  <a:srgbClr val="166534"/>
+                  <a:srgbClr val="A5335F"/>
                 </a:solidFill>
                 <a:latin typeface="Verdana"/>
               </a:rPr>
@@ -5534,7 +5534,7 @@
             <a:r>
               <a:rPr sz="1300" b="1" i="0" spc="156">
                 <a:solidFill>
-                  <a:srgbClr val="166534"/>
+                  <a:srgbClr val="A5335F"/>
                 </a:solidFill>
                 <a:latin typeface="Verdana"/>
               </a:rPr>
@@ -6083,7 +6083,7 @@
             <a:r>
               <a:rPr sz="1300" b="1" i="0" spc="156">
                 <a:solidFill>
-                  <a:srgbClr val="166534"/>
+                  <a:srgbClr val="A5335F"/>
                 </a:solidFill>
                 <a:latin typeface="Verdana"/>
               </a:rPr>
@@ -6233,7 +6233,7 @@
             </a:avLst>
           </a:prstGeom>
           <a:solidFill>
-            <a:srgbClr val="E3F1E7"/>
+            <a:srgbClr val="FCE9F0"/>
           </a:solidFill>
           <a:ln>
             <a:noFill/>
@@ -6290,7 +6290,7 @@
             <a:r>
               <a:rPr sz="1500" b="1" i="0">
                 <a:solidFill>
-                  <a:srgbClr val="166534"/>
+                  <a:srgbClr val="A5335F"/>
                 </a:solidFill>
                 <a:latin typeface="Verdana"/>
               </a:rPr>
@@ -6401,7 +6401,7 @@
             </a:avLst>
           </a:prstGeom>
           <a:solidFill>
-            <a:srgbClr val="E3F1E7"/>
+            <a:srgbClr val="FCE9F0"/>
           </a:solidFill>
           <a:ln>
             <a:noFill/>
@@ -6458,7 +6458,7 @@
             <a:r>
               <a:rPr sz="1500" b="1" i="0">
                 <a:solidFill>
-                  <a:srgbClr val="166534"/>
+                  <a:srgbClr val="A5335F"/>
                 </a:solidFill>
                 <a:latin typeface="Verdana"/>
               </a:rPr>
@@ -6569,7 +6569,7 @@
             </a:avLst>
           </a:prstGeom>
           <a:solidFill>
-            <a:srgbClr val="E3F1E7"/>
+            <a:srgbClr val="FCE9F0"/>
           </a:solidFill>
           <a:ln>
             <a:noFill/>
@@ -6626,7 +6626,7 @@
             <a:r>
               <a:rPr sz="1500" b="1" i="0">
                 <a:solidFill>
-                  <a:srgbClr val="166534"/>
+                  <a:srgbClr val="A5335F"/>
                 </a:solidFill>
                 <a:latin typeface="Verdana"/>
               </a:rPr>
@@ -6737,7 +6737,7 @@
             </a:avLst>
           </a:prstGeom>
           <a:solidFill>
-            <a:srgbClr val="E3F1E7"/>
+            <a:srgbClr val="FCE9F0"/>
           </a:solidFill>
           <a:ln>
             <a:noFill/>
@@ -6794,7 +6794,7 @@
             <a:r>
               <a:rPr sz="1500" b="1" i="0">
                 <a:solidFill>
-                  <a:srgbClr val="166534"/>
+                  <a:srgbClr val="A5335F"/>
                 </a:solidFill>
                 <a:latin typeface="Verdana"/>
               </a:rPr>
@@ -7010,7 +7010,7 @@
             <a:r>
               <a:rPr sz="1300" b="1" i="0" spc="156">
                 <a:solidFill>
-                  <a:srgbClr val="166534"/>
+                  <a:srgbClr val="A5335F"/>
                 </a:solidFill>
                 <a:latin typeface="Verdana"/>
               </a:rPr>
@@ -7160,7 +7160,7 @@
             </a:avLst>
           </a:prstGeom>
           <a:solidFill>
-            <a:srgbClr val="E3F1E7"/>
+            <a:srgbClr val="FCE9F0"/>
           </a:solidFill>
           <a:ln>
             <a:noFill/>
@@ -7217,7 +7217,7 @@
             <a:r>
               <a:rPr sz="1500" b="1" i="0">
                 <a:solidFill>
-                  <a:srgbClr val="166534"/>
+                  <a:srgbClr val="A5335F"/>
                 </a:solidFill>
                 <a:latin typeface="Verdana"/>
               </a:rPr>
@@ -7337,7 +7337,7 @@
             </a:avLst>
           </a:prstGeom>
           <a:solidFill>
-            <a:srgbClr val="E3F1E7"/>
+            <a:srgbClr val="FCE9F0"/>
           </a:solidFill>
           <a:ln>
             <a:noFill/>
@@ -7394,7 +7394,7 @@
             <a:r>
               <a:rPr sz="1500" b="1" i="0">
                 <a:solidFill>
-                  <a:srgbClr val="166534"/>
+                  <a:srgbClr val="A5335F"/>
                 </a:solidFill>
                 <a:latin typeface="Verdana"/>
               </a:rPr>
@@ -7514,7 +7514,7 @@
             </a:avLst>
           </a:prstGeom>
           <a:solidFill>
-            <a:srgbClr val="E3F1E7"/>
+            <a:srgbClr val="FCE9F0"/>
           </a:solidFill>
           <a:ln>
             <a:noFill/>
@@ -7571,7 +7571,7 @@
             <a:r>
               <a:rPr sz="1500" b="1" i="0">
                 <a:solidFill>
-                  <a:srgbClr val="166534"/>
+                  <a:srgbClr val="A5335F"/>
                 </a:solidFill>
                 <a:latin typeface="Verdana"/>
               </a:rPr>
@@ -7691,7 +7691,7 @@
             </a:avLst>
           </a:prstGeom>
           <a:solidFill>
-            <a:srgbClr val="E3F1E7"/>
+            <a:srgbClr val="FCE9F0"/>
           </a:solidFill>
           <a:ln>
             <a:noFill/>
@@ -7748,7 +7748,7 @@
             <a:r>
               <a:rPr sz="1500" b="1" i="0">
                 <a:solidFill>
-                  <a:srgbClr val="166534"/>
+                  <a:srgbClr val="A5335F"/>
                 </a:solidFill>
                 <a:latin typeface="Verdana"/>
               </a:rPr>
@@ -7973,7 +7973,7 @@
             <a:r>
               <a:rPr sz="1300" b="1" i="0" spc="156">
                 <a:solidFill>
-                  <a:srgbClr val="166534"/>
+                  <a:srgbClr val="A5335F"/>
                 </a:solidFill>
                 <a:latin typeface="Verdana"/>
               </a:rPr>
@@ -8123,7 +8123,7 @@
             </a:avLst>
           </a:prstGeom>
           <a:solidFill>
-            <a:srgbClr val="E3F1E7"/>
+            <a:srgbClr val="FCE9F0"/>
           </a:solidFill>
           <a:ln>
             <a:noFill/>
@@ -8180,7 +8180,7 @@
             <a:r>
               <a:rPr sz="1500" b="1" i="0">
                 <a:solidFill>
-                  <a:srgbClr val="166534"/>
+                  <a:srgbClr val="A5335F"/>
                 </a:solidFill>
                 <a:latin typeface="Verdana"/>
               </a:rPr>
@@ -8291,7 +8291,7 @@
             </a:avLst>
           </a:prstGeom>
           <a:solidFill>
-            <a:srgbClr val="E3F1E7"/>
+            <a:srgbClr val="FCE9F0"/>
           </a:solidFill>
           <a:ln>
             <a:noFill/>
@@ -8348,7 +8348,7 @@
             <a:r>
               <a:rPr sz="1500" b="1" i="0">
                 <a:solidFill>
-                  <a:srgbClr val="166534"/>
+                  <a:srgbClr val="A5335F"/>
                 </a:solidFill>
                 <a:latin typeface="Verdana"/>
               </a:rPr>
@@ -8459,7 +8459,7 @@
             </a:avLst>
           </a:prstGeom>
           <a:solidFill>
-            <a:srgbClr val="E3F1E7"/>
+            <a:srgbClr val="FCE9F0"/>
           </a:solidFill>
           <a:ln>
             <a:noFill/>
@@ -8516,7 +8516,7 @@
             <a:r>
               <a:rPr sz="1500" b="1" i="0">
                 <a:solidFill>
-                  <a:srgbClr val="166534"/>
+                  <a:srgbClr val="A5335F"/>
                 </a:solidFill>
                 <a:latin typeface="Verdana"/>
               </a:rPr>
@@ -8627,7 +8627,7 @@
             </a:avLst>
           </a:prstGeom>
           <a:solidFill>
-            <a:srgbClr val="E3F1E7"/>
+            <a:srgbClr val="FCE9F0"/>
           </a:solidFill>
           <a:ln>
             <a:noFill/>
@@ -8684,7 +8684,7 @@
             <a:r>
               <a:rPr sz="1500" b="1" i="0">
                 <a:solidFill>
-                  <a:srgbClr val="166534"/>
+                  <a:srgbClr val="A5335F"/>
                 </a:solidFill>
                 <a:latin typeface="Verdana"/>
               </a:rPr>
@@ -8900,7 +8900,7 @@
             <a:r>
               <a:rPr sz="1300" b="1" i="0" spc="156">
                 <a:solidFill>
-                  <a:srgbClr val="166534"/>
+                  <a:srgbClr val="A5335F"/>
                 </a:solidFill>
                 <a:latin typeface="Verdana"/>
               </a:rPr>
@@ -9050,7 +9050,7 @@
             </a:avLst>
           </a:prstGeom>
           <a:solidFill>
-            <a:srgbClr val="E3F1E7"/>
+            <a:srgbClr val="FCE9F0"/>
           </a:solidFill>
           <a:ln>
             <a:noFill/>
@@ -9107,7 +9107,7 @@
             <a:r>
               <a:rPr sz="1500" b="1" i="0">
                 <a:solidFill>
-                  <a:srgbClr val="166534"/>
+                  <a:srgbClr val="A5335F"/>
                 </a:solidFill>
                 <a:latin typeface="Verdana"/>
               </a:rPr>
@@ -9227,7 +9227,7 @@
             </a:avLst>
           </a:prstGeom>
           <a:solidFill>
-            <a:srgbClr val="E3F1E7"/>
+            <a:srgbClr val="FCE9F0"/>
           </a:solidFill>
           <a:ln>
             <a:noFill/>
@@ -9284,7 +9284,7 @@
             <a:r>
               <a:rPr sz="1500" b="1" i="0">
                 <a:solidFill>
-                  <a:srgbClr val="166534"/>
+                  <a:srgbClr val="A5335F"/>
                 </a:solidFill>
                 <a:latin typeface="Verdana"/>
               </a:rPr>
@@ -9404,7 +9404,7 @@
             </a:avLst>
           </a:prstGeom>
           <a:solidFill>
-            <a:srgbClr val="E3F1E7"/>
+            <a:srgbClr val="FCE9F0"/>
           </a:solidFill>
           <a:ln>
             <a:noFill/>
@@ -9461,7 +9461,7 @@
             <a:r>
               <a:rPr sz="1500" b="1" i="0">
                 <a:solidFill>
-                  <a:srgbClr val="166534"/>
+                  <a:srgbClr val="A5335F"/>
                 </a:solidFill>
                 <a:latin typeface="Verdana"/>
               </a:rPr>
@@ -9581,7 +9581,7 @@
             </a:avLst>
           </a:prstGeom>
           <a:solidFill>
-            <a:srgbClr val="E3F1E7"/>
+            <a:srgbClr val="FCE9F0"/>
           </a:solidFill>
           <a:ln>
             <a:noFill/>
@@ -9638,7 +9638,7 @@
             <a:r>
               <a:rPr sz="1500" b="1" i="0">
                 <a:solidFill>
-                  <a:srgbClr val="166534"/>
+                  <a:srgbClr val="A5335F"/>
                 </a:solidFill>
                 <a:latin typeface="Verdana"/>
               </a:rPr>
@@ -10326,7 +10326,7 @@
             <a:r>
               <a:rPr sz="1300" b="1" i="0" spc="156">
                 <a:solidFill>
-                  <a:srgbClr val="166534"/>
+                  <a:srgbClr val="A5335F"/>
                 </a:solidFill>
                 <a:latin typeface="Verdana"/>
               </a:rPr>
@@ -10437,7 +10437,7 @@
             </a:avLst>
           </a:prstGeom>
           <a:solidFill>
-            <a:srgbClr val="E3F1E7"/>
+            <a:srgbClr val="FCE9F0"/>
           </a:solidFill>
           <a:ln>
             <a:noFill/>
@@ -10494,7 +10494,7 @@
             <a:r>
               <a:rPr sz="1500" b="1" i="0">
                 <a:solidFill>
-                  <a:srgbClr val="166534"/>
+                  <a:srgbClr val="A5335F"/>
                 </a:solidFill>
                 <a:latin typeface="Verdana"/>
               </a:rPr>
@@ -10605,7 +10605,7 @@
             </a:avLst>
           </a:prstGeom>
           <a:solidFill>
-            <a:srgbClr val="E3F1E7"/>
+            <a:srgbClr val="FCE9F0"/>
           </a:solidFill>
           <a:ln>
             <a:noFill/>
@@ -10662,7 +10662,7 @@
             <a:r>
               <a:rPr sz="1500" b="1" i="0">
                 <a:solidFill>
-                  <a:srgbClr val="166534"/>
+                  <a:srgbClr val="A5335F"/>
                 </a:solidFill>
                 <a:latin typeface="Verdana"/>
               </a:rPr>
@@ -10773,7 +10773,7 @@
             </a:avLst>
           </a:prstGeom>
           <a:solidFill>
-            <a:srgbClr val="E3F1E7"/>
+            <a:srgbClr val="FCE9F0"/>
           </a:solidFill>
           <a:ln>
             <a:noFill/>
@@ -10830,7 +10830,7 @@
             <a:r>
               <a:rPr sz="1500" b="1" i="0">
                 <a:solidFill>
-                  <a:srgbClr val="166534"/>
+                  <a:srgbClr val="A5335F"/>
                 </a:solidFill>
                 <a:latin typeface="Verdana"/>
               </a:rPr>
@@ -10941,7 +10941,7 @@
             </a:avLst>
           </a:prstGeom>
           <a:solidFill>
-            <a:srgbClr val="E3F1E7"/>
+            <a:srgbClr val="FCE9F0"/>
           </a:solidFill>
           <a:ln>
             <a:noFill/>
@@ -10998,7 +10998,7 @@
             <a:r>
               <a:rPr sz="1500" b="1" i="0">
                 <a:solidFill>
-                  <a:srgbClr val="166534"/>
+                  <a:srgbClr val="A5335F"/>
                 </a:solidFill>
                 <a:latin typeface="Verdana"/>
               </a:rPr>
@@ -11214,7 +11214,7 @@
             <a:r>
               <a:rPr sz="1300" b="1" i="0" spc="156">
                 <a:solidFill>
-                  <a:srgbClr val="166534"/>
+                  <a:srgbClr val="A5335F"/>
                 </a:solidFill>
                 <a:latin typeface="Verdana"/>
               </a:rPr>
@@ -11240,7 +11240,7 @@
             </a:avLst>
           </a:prstGeom>
           <a:solidFill>
-            <a:srgbClr val="E3F1E7"/>
+            <a:srgbClr val="FCE9F0"/>
           </a:solidFill>
           <a:ln w="12700">
             <a:solidFill>
@@ -11561,7 +11561,7 @@
             <a:r>
               <a:rPr sz="1300" b="1" i="0" spc="156">
                 <a:solidFill>
-                  <a:srgbClr val="166534"/>
+                  <a:srgbClr val="A5335F"/>
                 </a:solidFill>
                 <a:latin typeface="Verdana"/>
               </a:rPr>
@@ -11685,7 +11685,7 @@
             <a:r>
               <a:rPr sz="2400" b="1" i="0">
                 <a:solidFill>
-                  <a:srgbClr val="166534"/>
+                  <a:srgbClr val="A5335F"/>
                 </a:solidFill>
                 <a:latin typeface="Verdana"/>
               </a:rPr>
@@ -11809,7 +11809,7 @@
             <a:r>
               <a:rPr sz="2400" b="1" i="0">
                 <a:solidFill>
-                  <a:srgbClr val="166534"/>
+                  <a:srgbClr val="A5335F"/>
                 </a:solidFill>
                 <a:latin typeface="Verdana"/>
               </a:rPr>
@@ -11933,7 +11933,7 @@
             <a:r>
               <a:rPr sz="2400" b="1" i="0">
                 <a:solidFill>
-                  <a:srgbClr val="166534"/>
+                  <a:srgbClr val="A5335F"/>
                 </a:solidFill>
                 <a:latin typeface="Verdana"/>
               </a:rPr>
@@ -12057,7 +12057,7 @@
             <a:r>
               <a:rPr sz="2400" b="1" i="0">
                 <a:solidFill>
-                  <a:srgbClr val="166534"/>
+                  <a:srgbClr val="A5335F"/>
                 </a:solidFill>
                 <a:latin typeface="Verdana"/>
               </a:rPr>
@@ -12273,7 +12273,7 @@
             <a:r>
               <a:rPr sz="1300" b="1" i="0" spc="156">
                 <a:solidFill>
-                  <a:srgbClr val="166534"/>
+                  <a:srgbClr val="A5335F"/>
                 </a:solidFill>
                 <a:latin typeface="Verdana"/>
               </a:rPr>
@@ -12423,7 +12423,7 @@
             </a:avLst>
           </a:prstGeom>
           <a:solidFill>
-            <a:srgbClr val="E3F1E7"/>
+            <a:srgbClr val="FCE9F0"/>
           </a:solidFill>
           <a:ln>
             <a:noFill/>
@@ -12480,7 +12480,7 @@
             <a:r>
               <a:rPr sz="1500" b="1" i="0">
                 <a:solidFill>
-                  <a:srgbClr val="166534"/>
+                  <a:srgbClr val="A5335F"/>
                 </a:solidFill>
                 <a:latin typeface="Verdana"/>
               </a:rPr>
@@ -12591,7 +12591,7 @@
             </a:avLst>
           </a:prstGeom>
           <a:solidFill>
-            <a:srgbClr val="E3F1E7"/>
+            <a:srgbClr val="FCE9F0"/>
           </a:solidFill>
           <a:ln>
             <a:noFill/>
@@ -12648,7 +12648,7 @@
             <a:r>
               <a:rPr sz="1500" b="1" i="0">
                 <a:solidFill>
-                  <a:srgbClr val="166534"/>
+                  <a:srgbClr val="A5335F"/>
                 </a:solidFill>
                 <a:latin typeface="Verdana"/>
               </a:rPr>
@@ -12759,7 +12759,7 @@
             </a:avLst>
           </a:prstGeom>
           <a:solidFill>
-            <a:srgbClr val="E3F1E7"/>
+            <a:srgbClr val="FCE9F0"/>
           </a:solidFill>
           <a:ln>
             <a:noFill/>
@@ -12816,7 +12816,7 @@
             <a:r>
               <a:rPr sz="1500" b="1" i="0">
                 <a:solidFill>
-                  <a:srgbClr val="166534"/>
+                  <a:srgbClr val="A5335F"/>
                 </a:solidFill>
                 <a:latin typeface="Verdana"/>
               </a:rPr>
@@ -12927,7 +12927,7 @@
             </a:avLst>
           </a:prstGeom>
           <a:solidFill>
-            <a:srgbClr val="E3F1E7"/>
+            <a:srgbClr val="FCE9F0"/>
           </a:solidFill>
           <a:ln>
             <a:noFill/>
@@ -12984,7 +12984,7 @@
             <a:r>
               <a:rPr sz="1500" b="1" i="0">
                 <a:solidFill>
-                  <a:srgbClr val="166534"/>
+                  <a:srgbClr val="A5335F"/>
                 </a:solidFill>
                 <a:latin typeface="Verdana"/>
               </a:rPr>
@@ -13095,7 +13095,7 @@
             </a:avLst>
           </a:prstGeom>
           <a:solidFill>
-            <a:srgbClr val="E3F1E7"/>
+            <a:srgbClr val="FCE9F0"/>
           </a:solidFill>
           <a:ln>
             <a:noFill/>
@@ -13152,7 +13152,7 @@
             <a:r>
               <a:rPr sz="1500" b="1" i="0">
                 <a:solidFill>
-                  <a:srgbClr val="166534"/>
+                  <a:srgbClr val="A5335F"/>
                 </a:solidFill>
                 <a:latin typeface="Verdana"/>
               </a:rPr>
@@ -13263,7 +13263,7 @@
             </a:avLst>
           </a:prstGeom>
           <a:solidFill>
-            <a:srgbClr val="E3F1E7"/>
+            <a:srgbClr val="FCE9F0"/>
           </a:solidFill>
           <a:ln>
             <a:noFill/>
@@ -13320,7 +13320,7 @@
             <a:r>
               <a:rPr sz="1500" b="1" i="0">
                 <a:solidFill>
-                  <a:srgbClr val="166534"/>
+                  <a:srgbClr val="A5335F"/>
                 </a:solidFill>
                 <a:latin typeface="Verdana"/>
               </a:rPr>
@@ -13536,7 +13536,7 @@
             <a:r>
               <a:rPr sz="1300" b="1" i="0" spc="156">
                 <a:solidFill>
-                  <a:srgbClr val="166534"/>
+                  <a:srgbClr val="A5335F"/>
                 </a:solidFill>
                 <a:latin typeface="Verdana"/>
               </a:rPr>
@@ -13686,7 +13686,7 @@
             </a:avLst>
           </a:prstGeom>
           <a:solidFill>
-            <a:srgbClr val="E3F1E7"/>
+            <a:srgbClr val="FCE9F0"/>
           </a:solidFill>
           <a:ln>
             <a:noFill/>
@@ -13743,7 +13743,7 @@
             <a:r>
               <a:rPr sz="1500" b="1" i="0">
                 <a:solidFill>
-                  <a:srgbClr val="166534"/>
+                  <a:srgbClr val="A5335F"/>
                 </a:solidFill>
                 <a:latin typeface="Verdana"/>
               </a:rPr>
@@ -13863,7 +13863,7 @@
             </a:avLst>
           </a:prstGeom>
           <a:solidFill>
-            <a:srgbClr val="E3F1E7"/>
+            <a:srgbClr val="FCE9F0"/>
           </a:solidFill>
           <a:ln>
             <a:noFill/>
@@ -13920,7 +13920,7 @@
             <a:r>
               <a:rPr sz="1500" b="1" i="0">
                 <a:solidFill>
-                  <a:srgbClr val="166534"/>
+                  <a:srgbClr val="A5335F"/>
                 </a:solidFill>
                 <a:latin typeface="Verdana"/>
               </a:rPr>
@@ -14040,7 +14040,7 @@
             </a:avLst>
           </a:prstGeom>
           <a:solidFill>
-            <a:srgbClr val="E3F1E7"/>
+            <a:srgbClr val="FCE9F0"/>
           </a:solidFill>
           <a:ln>
             <a:noFill/>
@@ -14097,7 +14097,7 @@
             <a:r>
               <a:rPr sz="1500" b="1" i="0">
                 <a:solidFill>
-                  <a:srgbClr val="166534"/>
+                  <a:srgbClr val="A5335F"/>
                 </a:solidFill>
                 <a:latin typeface="Verdana"/>
               </a:rPr>
@@ -14217,7 +14217,7 @@
             </a:avLst>
           </a:prstGeom>
           <a:solidFill>
-            <a:srgbClr val="E3F1E7"/>
+            <a:srgbClr val="FCE9F0"/>
           </a:solidFill>
           <a:ln>
             <a:noFill/>
@@ -14274,7 +14274,7 @@
             <a:r>
               <a:rPr sz="1500" b="1" i="0">
                 <a:solidFill>
-                  <a:srgbClr val="166534"/>
+                  <a:srgbClr val="A5335F"/>
                 </a:solidFill>
                 <a:latin typeface="Verdana"/>
               </a:rPr>
@@ -14394,7 +14394,7 @@
             </a:avLst>
           </a:prstGeom>
           <a:solidFill>
-            <a:srgbClr val="E3F1E7"/>
+            <a:srgbClr val="FCE9F0"/>
           </a:solidFill>
           <a:ln>
             <a:noFill/>
@@ -14451,7 +14451,7 @@
             <a:r>
               <a:rPr sz="1500" b="1" i="0">
                 <a:solidFill>
-                  <a:srgbClr val="166534"/>
+                  <a:srgbClr val="A5335F"/>
                 </a:solidFill>
                 <a:latin typeface="Verdana"/>
               </a:rPr>
@@ -14571,7 +14571,7 @@
             </a:avLst>
           </a:prstGeom>
           <a:solidFill>
-            <a:srgbClr val="E3F1E7"/>
+            <a:srgbClr val="FCE9F0"/>
           </a:solidFill>
           <a:ln>
             <a:noFill/>
@@ -14628,7 +14628,7 @@
             <a:r>
               <a:rPr sz="1500" b="1" i="0">
                 <a:solidFill>
-                  <a:srgbClr val="166534"/>
+                  <a:srgbClr val="A5335F"/>
                 </a:solidFill>
                 <a:latin typeface="Verdana"/>
               </a:rPr>
@@ -14853,7 +14853,7 @@
             <a:r>
               <a:rPr sz="1300" b="1" i="0" spc="156">
                 <a:solidFill>
-                  <a:srgbClr val="166534"/>
+                  <a:srgbClr val="A5335F"/>
                 </a:solidFill>
                 <a:latin typeface="Verdana"/>
               </a:rPr>
@@ -15003,7 +15003,7 @@
             </a:avLst>
           </a:prstGeom>
           <a:solidFill>
-            <a:srgbClr val="E3F1E7"/>
+            <a:srgbClr val="FCE9F0"/>
           </a:solidFill>
           <a:ln>
             <a:noFill/>
@@ -15060,7 +15060,7 @@
             <a:r>
               <a:rPr sz="1500" b="1" i="0">
                 <a:solidFill>
-                  <a:srgbClr val="166534"/>
+                  <a:srgbClr val="A5335F"/>
                 </a:solidFill>
                 <a:latin typeface="Verdana"/>
               </a:rPr>
@@ -15171,7 +15171,7 @@
             </a:avLst>
           </a:prstGeom>
           <a:solidFill>
-            <a:srgbClr val="E3F1E7"/>
+            <a:srgbClr val="FCE9F0"/>
           </a:solidFill>
           <a:ln>
             <a:noFill/>
@@ -15228,7 +15228,7 @@
             <a:r>
               <a:rPr sz="1500" b="1" i="0">
                 <a:solidFill>
-                  <a:srgbClr val="166534"/>
+                  <a:srgbClr val="A5335F"/>
                 </a:solidFill>
                 <a:latin typeface="Verdana"/>
               </a:rPr>
@@ -15339,7 +15339,7 @@
             </a:avLst>
           </a:prstGeom>
           <a:solidFill>
-            <a:srgbClr val="E3F1E7"/>
+            <a:srgbClr val="FCE9F0"/>
           </a:solidFill>
           <a:ln>
             <a:noFill/>
@@ -15396,7 +15396,7 @@
             <a:r>
               <a:rPr sz="1500" b="1" i="0">
                 <a:solidFill>
-                  <a:srgbClr val="166534"/>
+                  <a:srgbClr val="A5335F"/>
                 </a:solidFill>
                 <a:latin typeface="Verdana"/>
               </a:rPr>
@@ -15507,7 +15507,7 @@
             </a:avLst>
           </a:prstGeom>
           <a:solidFill>
-            <a:srgbClr val="E3F1E7"/>
+            <a:srgbClr val="FCE9F0"/>
           </a:solidFill>
           <a:ln>
             <a:noFill/>
@@ -15564,7 +15564,7 @@
             <a:r>
               <a:rPr sz="1500" b="1" i="0">
                 <a:solidFill>
-                  <a:srgbClr val="166534"/>
+                  <a:srgbClr val="A5335F"/>
                 </a:solidFill>
                 <a:latin typeface="Verdana"/>
               </a:rPr>
@@ -15780,7 +15780,7 @@
             <a:r>
               <a:rPr sz="1300" b="1" i="0" spc="156">
                 <a:solidFill>
-                  <a:srgbClr val="166534"/>
+                  <a:srgbClr val="A5335F"/>
                 </a:solidFill>
                 <a:latin typeface="Verdana"/>
               </a:rPr>
@@ -15930,7 +15930,7 @@
             </a:avLst>
           </a:prstGeom>
           <a:solidFill>
-            <a:srgbClr val="E3F1E7"/>
+            <a:srgbClr val="FCE9F0"/>
           </a:solidFill>
           <a:ln>
             <a:noFill/>
@@ -15987,7 +15987,7 @@
             <a:r>
               <a:rPr sz="1500" b="1" i="0">
                 <a:solidFill>
-                  <a:srgbClr val="166534"/>
+                  <a:srgbClr val="A5335F"/>
                 </a:solidFill>
                 <a:latin typeface="Verdana"/>
               </a:rPr>
@@ -16107,7 +16107,7 @@
             </a:avLst>
           </a:prstGeom>
           <a:solidFill>
-            <a:srgbClr val="E3F1E7"/>
+            <a:srgbClr val="FCE9F0"/>
           </a:solidFill>
           <a:ln>
             <a:noFill/>
@@ -16164,7 +16164,7 @@
             <a:r>
               <a:rPr sz="1500" b="1" i="0">
                 <a:solidFill>
-                  <a:srgbClr val="166534"/>
+                  <a:srgbClr val="A5335F"/>
                 </a:solidFill>
                 <a:latin typeface="Verdana"/>
               </a:rPr>
@@ -16284,7 +16284,7 @@
             </a:avLst>
           </a:prstGeom>
           <a:solidFill>
-            <a:srgbClr val="E3F1E7"/>
+            <a:srgbClr val="FCE9F0"/>
           </a:solidFill>
           <a:ln>
             <a:noFill/>
@@ -16341,7 +16341,7 @@
             <a:r>
               <a:rPr sz="1500" b="1" i="0">
                 <a:solidFill>
-                  <a:srgbClr val="166534"/>
+                  <a:srgbClr val="A5335F"/>
                 </a:solidFill>
                 <a:latin typeface="Verdana"/>
               </a:rPr>
@@ -16461,7 +16461,7 @@
             </a:avLst>
           </a:prstGeom>
           <a:solidFill>
-            <a:srgbClr val="E3F1E7"/>
+            <a:srgbClr val="FCE9F0"/>
           </a:solidFill>
           <a:ln>
             <a:noFill/>
@@ -16518,7 +16518,7 @@
             <a:r>
               <a:rPr sz="1500" b="1" i="0">
                 <a:solidFill>
-                  <a:srgbClr val="166534"/>
+                  <a:srgbClr val="A5335F"/>
                 </a:solidFill>
                 <a:latin typeface="Verdana"/>
               </a:rPr>
@@ -16743,7 +16743,7 @@
             <a:r>
               <a:rPr sz="1300" b="1" i="0" spc="156">
                 <a:solidFill>
-                  <a:srgbClr val="166534"/>
+                  <a:srgbClr val="A5335F"/>
                 </a:solidFill>
                 <a:latin typeface="Verdana"/>
               </a:rPr>
@@ -16945,7 +16945,7 @@
             <a:r>
               <a:rPr sz="1800" b="1" i="0">
                 <a:solidFill>
-                  <a:srgbClr val="166534"/>
+                  <a:srgbClr val="A5335F"/>
                 </a:solidFill>
                 <a:latin typeface="Verdana"/>
               </a:rPr>
@@ -17065,7 +17065,7 @@
             <a:r>
               <a:rPr sz="1800" b="1" i="0">
                 <a:solidFill>
-                  <a:srgbClr val="166534"/>
+                  <a:srgbClr val="A5335F"/>
                 </a:solidFill>
                 <a:latin typeface="Verdana"/>
               </a:rPr>
@@ -17185,7 +17185,7 @@
             <a:r>
               <a:rPr sz="1800" b="1" i="0">
                 <a:solidFill>
-                  <a:srgbClr val="166534"/>
+                  <a:srgbClr val="A5335F"/>
                 </a:solidFill>
                 <a:latin typeface="Verdana"/>
               </a:rPr>
@@ -17305,7 +17305,7 @@
             <a:r>
               <a:rPr sz="1800" b="1" i="0">
                 <a:solidFill>
-                  <a:srgbClr val="166534"/>
+                  <a:srgbClr val="A5335F"/>
                 </a:solidFill>
                 <a:latin typeface="Verdana"/>
               </a:rPr>
@@ -17425,7 +17425,7 @@
             <a:r>
               <a:rPr sz="1800" b="1" i="0">
                 <a:solidFill>
-                  <a:srgbClr val="166534"/>
+                  <a:srgbClr val="A5335F"/>
                 </a:solidFill>
                 <a:latin typeface="Verdana"/>
               </a:rPr>
